--- a/Presentation.pptx
+++ b/Presentation.pptx
@@ -4,6 +4,9 @@
   <p:sldMasterIdLst>
     <p:sldMasterId id="2147483648" r:id="rId1"/>
   </p:sldMasterIdLst>
+  <p:notesMasterIdLst>
+    <p:notesMasterId r:id="rId16"/>
+  </p:notesMasterIdLst>
   <p:sldIdLst>
     <p:sldId id="256" r:id="rId2"/>
     <p:sldId id="257" r:id="rId3"/>
@@ -20,9 +23,6 @@
     <p:sldId id="268" r:id="rId14"/>
     <p:sldId id="269" r:id="rId15"/>
   </p:sldIdLst>
-  <p:notesMasterIdLst>
-    <p:notesMasterId r:id="rId16"/>
-  </p:notesMasterIdLst>
   <p:sldSz cx="12192000" cy="6858000"/>
   <p:notesSz cx="6858000" cy="12192000"/>
   <p:defaultTextStyle>
@@ -117,6 +117,11 @@
       </a:defRPr>
     </a:lvl9pPr>
   </p:defaultTextStyle>
+  <p:extLst>
+    <p:ext uri="{EFAFB233-063F-42B5-8137-9DF3F51BA10A}">
+      <p15:sldGuideLst xmlns:p15="http://schemas.microsoft.com/office/powerpoint/2012/main"/>
+    </p:ext>
+  </p:extLst>
 </p:presentation>
 </file>
 
@@ -142,234 +147,10 @@
           <a:chExt cx="0" cy="0"/>
         </a:xfrm>
       </p:grpSpPr>
-      <p:sp>
-        <p:nvSpPr>
-          <p:cNvPr id="2" name="Header Placeholder 1"/>
-          <p:cNvSpPr>
-            <a:spLocks noGrp="1"/>
-          </p:cNvSpPr>
-          <p:nvPr>
-            <p:ph type="hdr" sz="quarter"/>
-          </p:nvPr>
-        </p:nvSpPr>
-        <p:spPr>
-          <a:xfrm>
-            <a:off x="0" y="0"/>
-            <a:ext cx="2971800" cy="458788"/>
-          </a:xfrm>
-          <a:prstGeom prst="rect">
-            <a:avLst/>
-          </a:prstGeom>
-        </p:spPr>
-        <p:txBody>
-          <a:bodyPr vert="horz" lIns="91440" tIns="45720" rIns="91440" bIns="45720" rtlCol="0"/>
-          <a:lstStyle>
-            <a:lvl1pPr algn="l">
-              <a:defRPr sz="1200"/>
-            </a:lvl1pPr>
-          </a:lstStyle>
-          <a:p>
-            <a:endParaRPr lang="en-US"/>
-          </a:p>
-        </p:txBody>
-      </p:sp>
-      <p:sp>
-        <p:nvSpPr>
-          <p:cNvPr id="3" name="Date Placeholder 2"/>
-          <p:cNvSpPr>
-            <a:spLocks noGrp="1"/>
-          </p:cNvSpPr>
-          <p:nvPr>
-            <p:ph type="dt" idx="1"/>
-          </p:nvPr>
-        </p:nvSpPr>
-        <p:spPr>
-          <a:xfrm>
-            <a:off x="3884613" y="0"/>
-            <a:ext cx="2971800" cy="458788"/>
-          </a:xfrm>
-          <a:prstGeom prst="rect">
-            <a:avLst/>
-          </a:prstGeom>
-        </p:spPr>
-        <p:txBody>
-          <a:bodyPr vert="horz" lIns="91440" tIns="45720" rIns="91440" bIns="45720" rtlCol="0"/>
-          <a:lstStyle>
-            <a:lvl1pPr algn="r">
-              <a:defRPr sz="1200"/>
-            </a:lvl1pPr>
-          </a:lstStyle>
-          <a:p>
-            <a:fld id="{5282F153-3F37-0F45-9E97-73ACFA13230C}" type="datetimeFigureOut">
-              <a:rPr lang="en-US"/>
-              <a:t>7/23/19</a:t>
-            </a:fld>
-            <a:endParaRPr lang="en-US"/>
-          </a:p>
-        </p:txBody>
-      </p:sp>
-      <p:sp>
-        <p:nvSpPr>
-          <p:cNvPr id="4" name="Slide Image Placeholder 3"/>
-          <p:cNvSpPr>
-            <a:spLocks noGrp="1" noRot="1" noChangeAspect="1"/>
-          </p:cNvSpPr>
-          <p:nvPr>
-            <p:ph type="sldImg" idx="2"/>
-          </p:nvPr>
-        </p:nvSpPr>
-        <p:spPr>
-          <a:xfrm>
-            <a:off x="685800" y="1143000"/>
-            <a:ext cx="5486400" cy="3086100"/>
-          </a:xfrm>
-          <a:prstGeom prst="rect">
-            <a:avLst/>
-          </a:prstGeom>
-          <a:noFill/>
-          <a:ln w="12700">
-            <a:solidFill>
-              <a:prstClr val="black"/>
-            </a:solidFill>
-          </a:ln>
-        </p:spPr>
-        <p:txBody>
-          <a:bodyPr vert="horz" lIns="91440" tIns="45720" rIns="91440" bIns="45720" rtlCol="0" anchor="ctr"/>
-          <a:lstStyle/>
-          <a:p>
-            <a:endParaRPr lang="en-US"/>
-          </a:p>
-        </p:txBody>
-      </p:sp>
-      <p:sp>
-        <p:nvSpPr>
-          <p:cNvPr id="5" name="Notes Placeholder 4"/>
-          <p:cNvSpPr>
-            <a:spLocks noGrp="1"/>
-          </p:cNvSpPr>
-          <p:nvPr>
-            <p:ph type="body" sz="quarter" idx="3"/>
-          </p:nvPr>
-        </p:nvSpPr>
-        <p:spPr>
-          <a:xfrm>
-            <a:off x="685800" y="4400550"/>
-            <a:ext cx="5486400" cy="3600450"/>
-          </a:xfrm>
-          <a:prstGeom prst="rect">
-            <a:avLst/>
-          </a:prstGeom>
-        </p:spPr>
-        <p:txBody>
-          <a:bodyPr vert="horz" lIns="91440" tIns="45720" rIns="91440" bIns="45720" rtlCol="0"/>
-          <a:lstStyle/>
-          <a:p>
-            <a:pPr lvl="0"/>
-            <a:r>
-              <a:rPr lang="en-US"/>
-              <a:t>Click to edit Master text styles</a:t>
-            </a:r>
-          </a:p>
-          <a:p>
-            <a:pPr lvl="1"/>
-            <a:r>
-              <a:rPr lang="en-US"/>
-              <a:t>Second level</a:t>
-            </a:r>
-          </a:p>
-          <a:p>
-            <a:pPr lvl="2"/>
-            <a:r>
-              <a:rPr lang="en-US"/>
-              <a:t>Third level</a:t>
-            </a:r>
-          </a:p>
-          <a:p>
-            <a:pPr lvl="3"/>
-            <a:r>
-              <a:rPr lang="en-US"/>
-              <a:t>Fourth level</a:t>
-            </a:r>
-          </a:p>
-          <a:p>
-            <a:pPr lvl="4"/>
-            <a:r>
-              <a:rPr lang="en-US"/>
-              <a:t>Fifth level</a:t>
-            </a:r>
-          </a:p>
-        </p:txBody>
-      </p:sp>
-      <p:sp>
-        <p:nvSpPr>
-          <p:cNvPr id="6" name="Footer Placeholder 5"/>
-          <p:cNvSpPr>
-            <a:spLocks noGrp="1"/>
-          </p:cNvSpPr>
-          <p:nvPr>
-            <p:ph type="ftr" sz="quarter" idx="4"/>
-          </p:nvPr>
-        </p:nvSpPr>
-        <p:spPr>
-          <a:xfrm>
-            <a:off x="0" y="8685213"/>
-            <a:ext cx="2971800" cy="458787"/>
-          </a:xfrm>
-          <a:prstGeom prst="rect">
-            <a:avLst/>
-          </a:prstGeom>
-        </p:spPr>
-        <p:txBody>
-          <a:bodyPr vert="horz" lIns="91440" tIns="45720" rIns="91440" bIns="45720" rtlCol="0" anchor="b"/>
-          <a:lstStyle>
-            <a:lvl1pPr algn="l">
-              <a:defRPr sz="1200"/>
-            </a:lvl1pPr>
-          </a:lstStyle>
-          <a:p>
-            <a:endParaRPr lang="en-US"/>
-          </a:p>
-        </p:txBody>
-      </p:sp>
-      <p:sp>
-        <p:nvSpPr>
-          <p:cNvPr id="7" name="Slide Number Placeholder 6"/>
-          <p:cNvSpPr>
-            <a:spLocks noGrp="1"/>
-          </p:cNvSpPr>
-          <p:nvPr>
-            <p:ph type="sldNum" sz="quarter" idx="5"/>
-          </p:nvPr>
-        </p:nvSpPr>
-        <p:spPr>
-          <a:xfrm>
-            <a:off x="3884613" y="8685213"/>
-            <a:ext cx="2971800" cy="458787"/>
-          </a:xfrm>
-          <a:prstGeom prst="rect">
-            <a:avLst/>
-          </a:prstGeom>
-        </p:spPr>
-        <p:txBody>
-          <a:bodyPr vert="horz" lIns="91440" tIns="45720" rIns="91440" bIns="45720" rtlCol="0" anchor="b"/>
-          <a:lstStyle>
-            <a:lvl1pPr algn="r">
-              <a:defRPr sz="1200"/>
-            </a:lvl1pPr>
-          </a:lstStyle>
-          <a:p>
-            <a:fld id="{CE5E9CC1-C706-0F49-92D6-E571CC5EEA8F}" type="slidenum">
-              <a:rPr lang="en-US"/>
-              <a:t>‹#›</a:t>
-            </a:fld>
-            <a:endParaRPr lang="en-US"/>
-          </a:p>
-        </p:txBody>
-      </p:sp>
     </p:spTree>
     <p:extLst>
       <p:ext uri="{BB962C8B-B14F-4D97-AF65-F5344CB8AC3E}">
-        <p14:creationId xmlns:p14="http://schemas.microsoft.com/office/powerpoint/2010/main" val="1024086991"/>
+        <p14:creationId xmlns:p14="http://schemas.microsoft.com/office/powerpoint/2010/main" val="3097973559"/>
       </p:ext>
     </p:extLst>
   </p:cSld>
@@ -513,10 +294,6 @@
           <a:bodyPr/>
           <a:lstStyle/>
           <a:p>
-            <a:r>
-              <a:rPr lang="en-US" dirty="0"/>
-              <a:t/>
-            </a:r>
             <a:endParaRPr lang="en-US" dirty="0"/>
           </a:p>
         </p:txBody>
@@ -601,10 +378,6 @@
           <a:bodyPr/>
           <a:lstStyle/>
           <a:p>
-            <a:r>
-              <a:rPr lang="en-US" dirty="0"/>
-              <a:t/>
-            </a:r>
             <a:endParaRPr lang="en-US" dirty="0"/>
           </a:p>
         </p:txBody>
@@ -689,10 +462,6 @@
           <a:bodyPr/>
           <a:lstStyle/>
           <a:p>
-            <a:r>
-              <a:rPr lang="en-US" dirty="0"/>
-              <a:t/>
-            </a:r>
             <a:endParaRPr lang="en-US" dirty="0"/>
           </a:p>
         </p:txBody>
@@ -777,10 +546,6 @@
           <a:bodyPr/>
           <a:lstStyle/>
           <a:p>
-            <a:r>
-              <a:rPr lang="en-US" dirty="0"/>
-              <a:t/>
-            </a:r>
             <a:endParaRPr lang="en-US" dirty="0"/>
           </a:p>
         </p:txBody>
@@ -865,10 +630,6 @@
           <a:bodyPr/>
           <a:lstStyle/>
           <a:p>
-            <a:r>
-              <a:rPr lang="en-US" dirty="0"/>
-              <a:t/>
-            </a:r>
             <a:endParaRPr lang="en-US" dirty="0"/>
           </a:p>
         </p:txBody>
@@ -953,10 +714,6 @@
           <a:bodyPr/>
           <a:lstStyle/>
           <a:p>
-            <a:r>
-              <a:rPr lang="en-US" dirty="0"/>
-              <a:t/>
-            </a:r>
             <a:endParaRPr lang="en-US" dirty="0"/>
           </a:p>
         </p:txBody>
@@ -1041,10 +798,6 @@
           <a:bodyPr/>
           <a:lstStyle/>
           <a:p>
-            <a:r>
-              <a:rPr lang="en-US" dirty="0"/>
-              <a:t/>
-            </a:r>
             <a:endParaRPr lang="en-US" dirty="0"/>
           </a:p>
         </p:txBody>
@@ -1129,10 +882,6 @@
           <a:bodyPr/>
           <a:lstStyle/>
           <a:p>
-            <a:r>
-              <a:rPr lang="en-US" dirty="0"/>
-              <a:t/>
-            </a:r>
             <a:endParaRPr lang="en-US" dirty="0"/>
           </a:p>
         </p:txBody>
@@ -1217,10 +966,6 @@
           <a:bodyPr/>
           <a:lstStyle/>
           <a:p>
-            <a:r>
-              <a:rPr lang="en-US" dirty="0"/>
-              <a:t/>
-            </a:r>
             <a:endParaRPr lang="en-US" dirty="0"/>
           </a:p>
         </p:txBody>
@@ -1305,10 +1050,6 @@
           <a:bodyPr/>
           <a:lstStyle/>
           <a:p>
-            <a:r>
-              <a:rPr lang="en-US" dirty="0"/>
-              <a:t/>
-            </a:r>
             <a:endParaRPr lang="en-US" dirty="0"/>
           </a:p>
         </p:txBody>
@@ -1393,10 +1134,6 @@
           <a:bodyPr/>
           <a:lstStyle/>
           <a:p>
-            <a:r>
-              <a:rPr lang="en-US" dirty="0"/>
-              <a:t/>
-            </a:r>
             <a:endParaRPr lang="en-US" dirty="0"/>
           </a:p>
         </p:txBody>
@@ -1481,10 +1218,6 @@
           <a:bodyPr/>
           <a:lstStyle/>
           <a:p>
-            <a:r>
-              <a:rPr lang="en-US" dirty="0"/>
-              <a:t/>
-            </a:r>
             <a:endParaRPr lang="en-US" dirty="0"/>
           </a:p>
         </p:txBody>
@@ -1569,10 +1302,6 @@
           <a:bodyPr/>
           <a:lstStyle/>
           <a:p>
-            <a:r>
-              <a:rPr lang="en-US" dirty="0"/>
-              <a:t/>
-            </a:r>
             <a:endParaRPr lang="en-US" dirty="0"/>
           </a:p>
         </p:txBody>
@@ -1657,10 +1386,6 @@
           <a:bodyPr/>
           <a:lstStyle/>
           <a:p>
-            <a:r>
-              <a:rPr lang="en-US" dirty="0"/>
-              <a:t/>
-            </a:r>
             <a:endParaRPr lang="en-US" dirty="0"/>
           </a:p>
         </p:txBody>
@@ -1739,6 +1464,7 @@
         <a:solidFill>
           <a:srgbClr val="FBF6EC"/>
         </a:solidFill>
+        <a:effectLst/>
       </p:bgPr>
     </p:bg>
     <p:spTree>
@@ -1766,6 +1492,11 @@
 <file path=ppt/slideMasters/slideMaster1.xml><?xml version="1.0" encoding="utf-8"?>
 <p:sldMaster xmlns:a="http://schemas.openxmlformats.org/drawingml/2006/main" xmlns:r="http://schemas.openxmlformats.org/officeDocument/2006/relationships" xmlns:p="http://schemas.openxmlformats.org/presentationml/2006/main">
   <p:cSld>
+    <p:bg>
+      <p:bgRef idx="1001">
+        <a:schemeClr val="bg1"/>
+      </p:bgRef>
+    </p:bg>
     <p:spTree>
       <p:nvGrpSpPr>
         <p:cNvPr id="1" name=""/>
@@ -2079,11 +1810,11 @@
           <a:bodyPr wrap="square" lIns="0" tIns="0" rIns="0" bIns="0" rtlCol="0" anchor="ctr"/>
           <a:lstStyle/>
           <a:p>
-            <a:pPr indent="0" marL="0">
-              <a:buNone/>
-            </a:pPr>
-            <a:r>
-              <a:rPr lang="en-US" sz="1300" spc="150" kern="0" dirty="0">
+            <a:pPr marL="0" indent="0">
+              <a:buNone/>
+            </a:pPr>
+            <a:r>
+              <a:rPr lang="en-US" sz="2400" kern="0" spc="150" dirty="0">
                 <a:solidFill>
                   <a:srgbClr val="6B6255"/>
                 </a:solidFill>
@@ -2093,7 +1824,7 @@
               </a:rPr>
               <a:t>DSA 3050A · Business Intelligence &amp; Visualization</a:t>
             </a:r>
-            <a:endParaRPr lang="en-US" sz="1300" dirty="0"/>
+            <a:endParaRPr lang="en-US" sz="2400" dirty="0"/>
           </a:p>
         </p:txBody>
       </p:sp>
@@ -2118,7 +1849,7 @@
           <a:bodyPr wrap="square" lIns="0" tIns="0" rIns="0" bIns="0" rtlCol="0" anchor="ctr"/>
           <a:lstStyle/>
           <a:p>
-            <a:pPr indent="0" marL="0">
+            <a:pPr marL="0" indent="0">
               <a:lnSpc>
                 <a:spcPts val="4600"/>
               </a:lnSpc>
@@ -2138,7 +1869,7 @@
             <a:endParaRPr lang="en-US" sz="4000" dirty="0"/>
           </a:p>
           <a:p>
-            <a:pPr indent="0" marL="0">
+            <a:pPr marL="0" indent="0">
               <a:lnSpc>
                 <a:spcPts val="4600"/>
               </a:lnSpc>
@@ -2167,20 +1898,20 @@
         </p:nvSpPr>
         <p:spPr>
           <a:xfrm>
-            <a:off x="822960" y="4343400"/>
-            <a:ext cx="10515600" cy="365760"/>
-          </a:xfrm>
-          <a:prstGeom prst="rect">
-            <a:avLst/>
-          </a:prstGeom>
-          <a:noFill/>
-          <a:ln/>
-        </p:spPr>
-        <p:txBody>
-          <a:bodyPr wrap="square" lIns="0" tIns="0" rIns="0" bIns="0" rtlCol="0" anchor="ctr"/>
-          <a:lstStyle/>
-          <a:p>
-            <a:pPr indent="0" marL="0">
+            <a:off x="822960" y="4343399"/>
+            <a:ext cx="10515600" cy="1828799"/>
+          </a:xfrm>
+          <a:prstGeom prst="rect">
+            <a:avLst/>
+          </a:prstGeom>
+          <a:noFill/>
+          <a:ln/>
+        </p:spPr>
+        <p:txBody>
+          <a:bodyPr wrap="square" lIns="0" tIns="0" rIns="0" bIns="0" rtlCol="0" anchor="ctr"/>
+          <a:lstStyle/>
+          <a:p>
+            <a:pPr marL="0" indent="0">
               <a:buNone/>
             </a:pPr>
             <a:r>
@@ -2192,10 +1923,75 @@
                 <a:ea typeface="Calibri" pitchFamily="34" charset="-122"/>
                 <a:cs typeface="Calibri" pitchFamily="34" charset="-120"/>
               </a:rPr>
-              <a:t>Group Project — Group 9</a:t>
-            </a:r>
+              <a:t>Group Project — </a:t>
+            </a:r>
+            <a:r>
+              <a:rPr lang="en-US" sz="1500">
+                <a:solidFill>
+                  <a:srgbClr val="6B6255"/>
+                </a:solidFill>
+                <a:latin typeface="Calibri" pitchFamily="34" charset="0"/>
+                <a:ea typeface="Calibri" pitchFamily="34" charset="-122"/>
+                <a:cs typeface="Calibri" pitchFamily="34" charset="-120"/>
+              </a:rPr>
+              <a:t>Group 6</a:t>
+            </a:r>
+            <a:endParaRPr lang="en-US" sz="1500" dirty="0">
+              <a:solidFill>
+                <a:srgbClr val="6B6255"/>
+              </a:solidFill>
+              <a:latin typeface="Calibri" pitchFamily="34" charset="0"/>
+              <a:ea typeface="Calibri" pitchFamily="34" charset="-122"/>
+              <a:cs typeface="Calibri" pitchFamily="34" charset="-120"/>
+            </a:endParaRPr>
+          </a:p>
+          <a:p>
+            <a:pPr marL="0" indent="0">
+              <a:buNone/>
+            </a:pPr>
+            <a:r>
+              <a:rPr lang="en-US" sz="1500" dirty="0">
+                <a:latin typeface="Calibri" pitchFamily="34" charset="0"/>
+                <a:ea typeface="Calibri" pitchFamily="34" charset="-122"/>
+                <a:cs typeface="Calibri" pitchFamily="34" charset="-120"/>
+              </a:rPr>
+              <a:t>Betelhem Kebede - 670549</a:t>
+            </a:r>
+          </a:p>
+          <a:p>
+            <a:r>
+              <a:rPr lang="en-US" sz="1500" dirty="0"/>
+              <a:t>Cynthia Gathogo – 668745</a:t>
+            </a:r>
+          </a:p>
+          <a:p>
+            <a:r>
+              <a:rPr lang="en-US" sz="1500" dirty="0" err="1"/>
+              <a:t>Merhawit</a:t>
+            </a:r>
+            <a:r>
+              <a:rPr lang="en-US" sz="1500" dirty="0"/>
+              <a:t> Kassa – 670554</a:t>
+            </a:r>
+          </a:p>
+          <a:p>
+            <a:r>
+              <a:rPr lang="en-US" sz="1500" dirty="0"/>
+              <a:t>Snit Kahsay – 670552</a:t>
+            </a:r>
+          </a:p>
+          <a:p>
+            <a:r>
+              <a:rPr lang="en-US" sz="1500" dirty="0"/>
+              <a:t>Hana Gashaw - 670555</a:t>
+            </a:r>
+          </a:p>
+          <a:p>
             <a:endParaRPr lang="en-US" sz="1500" dirty="0"/>
           </a:p>
+          <a:p>
+            <a:endParaRPr lang="en-US" sz="1500" dirty="0"/>
+          </a:p>
         </p:txBody>
       </p:sp>
       <p:sp>
@@ -2206,7 +2002,7 @@
         </p:nvSpPr>
         <p:spPr>
           <a:xfrm>
-            <a:off x="822960" y="6035040"/>
+            <a:off x="1547579" y="971334"/>
             <a:ext cx="10515600" cy="320040"/>
           </a:xfrm>
           <a:prstGeom prst="rect">
@@ -2219,11 +2015,11 @@
           <a:bodyPr wrap="square" lIns="0" tIns="0" rIns="0" bIns="0" rtlCol="0" anchor="ctr"/>
           <a:lstStyle/>
           <a:p>
-            <a:pPr indent="0" marL="0">
-              <a:buNone/>
-            </a:pPr>
-            <a:r>
-              <a:rPr lang="en-US" sz="1100" dirty="0">
+            <a:pPr marL="0" indent="0">
+              <a:buNone/>
+            </a:pPr>
+            <a:r>
+              <a:rPr lang="en-US" sz="3600" dirty="0">
                 <a:solidFill>
                   <a:srgbClr val="6B6255"/>
                 </a:solidFill>
@@ -2233,7 +2029,7 @@
               </a:rPr>
               <a:t>United States International University — Africa</a:t>
             </a:r>
-            <a:endParaRPr lang="en-US" sz="1100" dirty="0"/>
+            <a:endParaRPr lang="en-US" sz="3600" dirty="0"/>
           </a:p>
         </p:txBody>
       </p:sp>
@@ -2283,11 +2079,11 @@
           <a:bodyPr wrap="square" lIns="0" tIns="0" rIns="0" bIns="0" rtlCol="0" anchor="ctr"/>
           <a:lstStyle/>
           <a:p>
-            <a:pPr indent="0" marL="0">
-              <a:buNone/>
-            </a:pPr>
-            <a:r>
-              <a:rPr lang="en-US" sz="1200" spc="200" kern="0" dirty="0">
+            <a:pPr marL="0" indent="0">
+              <a:buNone/>
+            </a:pPr>
+            <a:r>
+              <a:rPr lang="en-US" sz="1200" kern="0" spc="200" dirty="0">
                 <a:solidFill>
                   <a:srgbClr val="6B6255"/>
                 </a:solidFill>
@@ -2322,7 +2118,7 @@
           <a:bodyPr wrap="square" lIns="0" tIns="0" rIns="0" bIns="0" rtlCol="0" anchor="ctr"/>
           <a:lstStyle/>
           <a:p>
-            <a:pPr indent="0" marL="0">
+            <a:pPr marL="0" indent="0">
               <a:buNone/>
             </a:pPr>
             <a:r>
@@ -2342,15 +2138,15 @@
       </p:sp>
       <p:pic>
         <p:nvPicPr>
-          <p:cNvPr id="4" name="Image 0" descr="/home/claude/work/dashboard_screens/04_Property_Drill_Through.png">    </p:cNvPr>
+          <p:cNvPr id="4" name="Image 0" descr="/home/claude/work/dashboard_screens/04_Property_Drill_Through.png"/>
           <p:cNvPicPr>
             <a:picLocks noChangeAspect="1"/>
           </p:cNvPicPr>
           <p:nvPr/>
         </p:nvPicPr>
         <p:blipFill>
-          <a:blip r:embed="rId1"/>
-          <a:srcRect l="0" r="0" t="0" b="0"/>
+          <a:blip r:embed="rId3"/>
+          <a:srcRect/>
           <a:stretch/>
         </p:blipFill>
         <p:spPr>
@@ -2384,7 +2180,7 @@
           <a:bodyPr wrap="square" lIns="0" tIns="0" rIns="0" bIns="0" rtlCol="0" anchor="ctr"/>
           <a:lstStyle/>
           <a:p>
-            <a:pPr indent="0" marL="0">
+            <a:pPr marL="0" indent="0">
               <a:buNone/>
             </a:pPr>
             <a:r>
@@ -2423,7 +2219,7 @@
           <a:bodyPr wrap="square" lIns="0" tIns="0" rIns="0" bIns="0" rtlCol="0" anchor="ctr"/>
           <a:lstStyle/>
           <a:p>
-            <a:pPr algn="r" indent="0" marL="0">
+            <a:pPr marL="0" indent="0" algn="r">
               <a:buNone/>
             </a:pPr>
             <a:r>
@@ -2487,11 +2283,11 @@
           <a:bodyPr wrap="square" lIns="0" tIns="0" rIns="0" bIns="0" rtlCol="0" anchor="ctr"/>
           <a:lstStyle/>
           <a:p>
-            <a:pPr indent="0" marL="0">
-              <a:buNone/>
-            </a:pPr>
-            <a:r>
-              <a:rPr lang="en-US" sz="1200" spc="200" kern="0" dirty="0">
+            <a:pPr marL="0" indent="0">
+              <a:buNone/>
+            </a:pPr>
+            <a:r>
+              <a:rPr lang="en-US" sz="1200" kern="0" spc="200" dirty="0">
                 <a:solidFill>
                   <a:srgbClr val="6B6255"/>
                 </a:solidFill>
@@ -2526,7 +2322,7 @@
           <a:bodyPr wrap="square" lIns="0" tIns="0" rIns="0" bIns="0" rtlCol="0" anchor="ctr"/>
           <a:lstStyle/>
           <a:p>
-            <a:pPr indent="0" marL="0">
+            <a:pPr marL="0" indent="0">
               <a:buNone/>
             </a:pPr>
             <a:r>
@@ -2546,15 +2342,15 @@
       </p:sp>
       <p:pic>
         <p:nvPicPr>
-          <p:cNvPr id="4" name="Image 0" descr="/home/claude/work/dashboard_screens/05_Property_Furnishing_Insights.png">    </p:cNvPr>
+          <p:cNvPr id="4" name="Image 0" descr="/home/claude/work/dashboard_screens/05_Property_Furnishing_Insights.png"/>
           <p:cNvPicPr>
             <a:picLocks noChangeAspect="1"/>
           </p:cNvPicPr>
           <p:nvPr/>
         </p:nvPicPr>
         <p:blipFill>
-          <a:blip r:embed="rId1"/>
-          <a:srcRect l="0" r="0" t="0" b="0"/>
+          <a:blip r:embed="rId3"/>
+          <a:srcRect/>
           <a:stretch/>
         </p:blipFill>
         <p:spPr>
@@ -2588,7 +2384,7 @@
           <a:bodyPr wrap="square" lIns="0" tIns="0" rIns="0" bIns="0" rtlCol="0" anchor="ctr"/>
           <a:lstStyle/>
           <a:p>
-            <a:pPr indent="0" marL="0">
+            <a:pPr marL="0" indent="0">
               <a:buNone/>
             </a:pPr>
             <a:r>
@@ -2627,7 +2423,7 @@
           <a:bodyPr wrap="square" lIns="0" tIns="0" rIns="0" bIns="0" rtlCol="0" anchor="ctr"/>
           <a:lstStyle/>
           <a:p>
-            <a:pPr algn="r" indent="0" marL="0">
+            <a:pPr marL="0" indent="0" algn="r">
               <a:buNone/>
             </a:pPr>
             <a:r>
@@ -2691,11 +2487,11 @@
           <a:bodyPr wrap="square" lIns="0" tIns="0" rIns="0" bIns="0" rtlCol="0" anchor="ctr"/>
           <a:lstStyle/>
           <a:p>
-            <a:pPr indent="0" marL="0">
-              <a:buNone/>
-            </a:pPr>
-            <a:r>
-              <a:rPr lang="en-US" sz="1200" spc="200" kern="0" dirty="0">
+            <a:pPr marL="0" indent="0">
+              <a:buNone/>
+            </a:pPr>
+            <a:r>
+              <a:rPr lang="en-US" sz="1200" kern="0" spc="200" dirty="0">
                 <a:solidFill>
                   <a:srgbClr val="6B6255"/>
                 </a:solidFill>
@@ -2730,7 +2526,7 @@
           <a:bodyPr wrap="square" lIns="0" tIns="0" rIns="0" bIns="0" rtlCol="0" anchor="ctr"/>
           <a:lstStyle/>
           <a:p>
-            <a:pPr indent="0" marL="0">
+            <a:pPr marL="0" indent="0">
               <a:buNone/>
             </a:pPr>
             <a:r>
@@ -2769,7 +2565,7 @@
           <a:bodyPr wrap="square" lIns="0" tIns="0" rIns="0" bIns="0" rtlCol="0" anchor="ctr"/>
           <a:lstStyle/>
           <a:p>
-            <a:pPr indent="0" marL="0">
+            <a:pPr marL="0" indent="0">
               <a:buNone/>
             </a:pPr>
             <a:r>
@@ -2808,7 +2604,7 @@
           <a:bodyPr wrap="square" lIns="0" tIns="0" rIns="0" bIns="0" rtlCol="0" anchor="ctr"/>
           <a:lstStyle/>
           <a:p>
-            <a:pPr indent="0" marL="0">
+            <a:pPr marL="0" indent="0">
               <a:lnSpc>
                 <a:spcPts val="1800"/>
               </a:lnSpc>
@@ -2850,7 +2646,7 @@
           <a:bodyPr wrap="square" lIns="0" tIns="0" rIns="0" bIns="0" rtlCol="0" anchor="ctr"/>
           <a:lstStyle/>
           <a:p>
-            <a:pPr indent="0" marL="0">
+            <a:pPr marL="0" indent="0">
               <a:buNone/>
             </a:pPr>
             <a:r>
@@ -2889,7 +2685,7 @@
           <a:bodyPr wrap="square" lIns="0" tIns="0" rIns="0" bIns="0" rtlCol="0" anchor="ctr"/>
           <a:lstStyle/>
           <a:p>
-            <a:pPr indent="0" marL="0">
+            <a:pPr marL="0" indent="0">
               <a:lnSpc>
                 <a:spcPts val="1800"/>
               </a:lnSpc>
@@ -2931,7 +2727,7 @@
           <a:bodyPr wrap="square" lIns="0" tIns="0" rIns="0" bIns="0" rtlCol="0" anchor="ctr"/>
           <a:lstStyle/>
           <a:p>
-            <a:pPr indent="0" marL="0">
+            <a:pPr marL="0" indent="0">
               <a:buNone/>
             </a:pPr>
             <a:r>
@@ -2970,7 +2766,7 @@
           <a:bodyPr wrap="square" lIns="0" tIns="0" rIns="0" bIns="0" rtlCol="0" anchor="ctr"/>
           <a:lstStyle/>
           <a:p>
-            <a:pPr indent="0" marL="0">
+            <a:pPr marL="0" indent="0">
               <a:lnSpc>
                 <a:spcPts val="1800"/>
               </a:lnSpc>
@@ -3012,7 +2808,7 @@
           <a:bodyPr wrap="square" lIns="0" tIns="0" rIns="0" bIns="0" rtlCol="0" anchor="ctr"/>
           <a:lstStyle/>
           <a:p>
-            <a:pPr indent="0" marL="0">
+            <a:pPr marL="0" indent="0">
               <a:buNone/>
             </a:pPr>
             <a:r>
@@ -3051,7 +2847,7 @@
           <a:bodyPr wrap="square" lIns="0" tIns="0" rIns="0" bIns="0" rtlCol="0" anchor="ctr"/>
           <a:lstStyle/>
           <a:p>
-            <a:pPr algn="r" indent="0" marL="0">
+            <a:pPr marL="0" indent="0" algn="r">
               <a:buNone/>
             </a:pPr>
             <a:r>
@@ -3115,11 +2911,11 @@
           <a:bodyPr wrap="square" lIns="0" tIns="0" rIns="0" bIns="0" rtlCol="0" anchor="ctr"/>
           <a:lstStyle/>
           <a:p>
-            <a:pPr indent="0" marL="0">
-              <a:buNone/>
-            </a:pPr>
-            <a:r>
-              <a:rPr lang="en-US" sz="1200" spc="200" kern="0" dirty="0">
+            <a:pPr marL="0" indent="0">
+              <a:buNone/>
+            </a:pPr>
+            <a:r>
+              <a:rPr lang="en-US" sz="1200" kern="0" spc="200" dirty="0">
                 <a:solidFill>
                   <a:srgbClr val="6B6255"/>
                 </a:solidFill>
@@ -3154,7 +2950,7 @@
           <a:bodyPr wrap="square" lIns="0" tIns="0" rIns="0" bIns="0" rtlCol="0" anchor="ctr"/>
           <a:lstStyle/>
           <a:p>
-            <a:pPr indent="0" marL="0">
+            <a:pPr marL="0" indent="0">
               <a:buNone/>
             </a:pPr>
             <a:r>
@@ -3180,7 +2976,7 @@
         </p:nvSpPr>
         <p:spPr>
           <a:xfrm>
-            <a:off x="640080" y="1965960"/>
+            <a:off x="594360" y="1060186"/>
             <a:ext cx="10881360" cy="4023360"/>
           </a:xfrm>
           <a:prstGeom prst="rect">
@@ -3335,7 +3131,7 @@
           <a:bodyPr wrap="square" lIns="0" tIns="0" rIns="0" bIns="0" rtlCol="0" anchor="ctr"/>
           <a:lstStyle/>
           <a:p>
-            <a:pPr indent="0" marL="0">
+            <a:pPr marL="0" indent="0">
               <a:buNone/>
             </a:pPr>
             <a:r>
@@ -3374,7 +3170,7 @@
           <a:bodyPr wrap="square" lIns="0" tIns="0" rIns="0" bIns="0" rtlCol="0" anchor="ctr"/>
           <a:lstStyle/>
           <a:p>
-            <a:pPr algn="r" indent="0" marL="0">
+            <a:pPr marL="0" indent="0" algn="r">
               <a:buNone/>
             </a:pPr>
             <a:r>
@@ -3438,7 +3234,7 @@
           <a:bodyPr wrap="square" lIns="0" tIns="0" rIns="0" bIns="0" rtlCol="0" anchor="ctr"/>
           <a:lstStyle/>
           <a:p>
-            <a:pPr indent="0" marL="0">
+            <a:pPr marL="0" indent="0">
               <a:buNone/>
             </a:pPr>
             <a:r>
@@ -3477,7 +3273,7 @@
           <a:bodyPr wrap="square" lIns="0" tIns="0" rIns="0" bIns="0" rtlCol="0" anchor="ctr"/>
           <a:lstStyle/>
           <a:p>
-            <a:pPr indent="0" marL="0">
+            <a:pPr marL="0" indent="0">
               <a:buNone/>
             </a:pPr>
             <a:r>
@@ -3516,7 +3312,7 @@
           <a:bodyPr wrap="square" lIns="0" tIns="0" rIns="0" bIns="0" rtlCol="0" anchor="ctr"/>
           <a:lstStyle/>
           <a:p>
-            <a:pPr indent="0" marL="0">
+            <a:pPr marL="0" indent="0">
               <a:buNone/>
             </a:pPr>
             <a:r>
@@ -3580,11 +3376,11 @@
           <a:bodyPr wrap="square" lIns="0" tIns="0" rIns="0" bIns="0" rtlCol="0" anchor="ctr"/>
           <a:lstStyle/>
           <a:p>
-            <a:pPr indent="0" marL="0">
-              <a:buNone/>
-            </a:pPr>
-            <a:r>
-              <a:rPr lang="en-US" sz="1200" spc="200" kern="0" dirty="0">
+            <a:pPr marL="0" indent="0">
+              <a:buNone/>
+            </a:pPr>
+            <a:r>
+              <a:rPr lang="en-US" sz="1200" kern="0" spc="200" dirty="0">
                 <a:solidFill>
                   <a:srgbClr val="6B6255"/>
                 </a:solidFill>
@@ -3619,7 +3415,7 @@
           <a:bodyPr wrap="square" lIns="0" tIns="0" rIns="0" bIns="0" rtlCol="0" anchor="ctr"/>
           <a:lstStyle/>
           <a:p>
-            <a:pPr indent="0" marL="0">
+            <a:pPr marL="0" indent="0">
               <a:buNone/>
             </a:pPr>
             <a:r>
@@ -3658,7 +3454,7 @@
           <a:bodyPr wrap="square" lIns="0" tIns="0" rIns="0" bIns="0" rtlCol="0" anchor="ctr"/>
           <a:lstStyle/>
           <a:p>
-            <a:pPr indent="0" marL="0">
+            <a:pPr marL="0" indent="0">
               <a:lnSpc>
                 <a:spcPts val="2400"/>
               </a:lnSpc>
@@ -3700,7 +3496,7 @@
           <a:bodyPr wrap="square" lIns="0" tIns="0" rIns="0" bIns="0" rtlCol="0" anchor="ctr"/>
           <a:lstStyle/>
           <a:p>
-            <a:pPr indent="0" marL="0">
+            <a:pPr marL="0" indent="0">
               <a:buNone/>
             </a:pPr>
             <a:r>
@@ -3866,7 +3662,7 @@
           <a:bodyPr wrap="square" lIns="0" tIns="0" rIns="0" bIns="0" rtlCol="0" anchor="ctr"/>
           <a:lstStyle/>
           <a:p>
-            <a:pPr indent="0" marL="0">
+            <a:pPr marL="0" indent="0">
               <a:buNone/>
             </a:pPr>
             <a:r>
@@ -3905,7 +3701,7 @@
           <a:bodyPr wrap="square" lIns="0" tIns="0" rIns="0" bIns="0" rtlCol="0" anchor="ctr"/>
           <a:lstStyle/>
           <a:p>
-            <a:pPr algn="r" indent="0" marL="0">
+            <a:pPr marL="0" indent="0" algn="r">
               <a:buNone/>
             </a:pPr>
             <a:r>
@@ -3969,11 +3765,11 @@
           <a:bodyPr wrap="square" lIns="0" tIns="0" rIns="0" bIns="0" rtlCol="0" anchor="ctr"/>
           <a:lstStyle/>
           <a:p>
-            <a:pPr indent="0" marL="0">
-              <a:buNone/>
-            </a:pPr>
-            <a:r>
-              <a:rPr lang="en-US" sz="1200" spc="200" kern="0" dirty="0">
+            <a:pPr marL="0" indent="0">
+              <a:buNone/>
+            </a:pPr>
+            <a:r>
+              <a:rPr lang="en-US" sz="1200" kern="0" spc="200" dirty="0">
                 <a:solidFill>
                   <a:srgbClr val="6B6255"/>
                 </a:solidFill>
@@ -4008,7 +3804,7 @@
           <a:bodyPr wrap="square" lIns="0" tIns="0" rIns="0" bIns="0" rtlCol="0" anchor="ctr"/>
           <a:lstStyle/>
           <a:p>
-            <a:pPr indent="0" marL="0">
+            <a:pPr marL="0" indent="0">
               <a:buNone/>
             </a:pPr>
             <a:r>
@@ -4047,7 +3843,7 @@
           <a:bodyPr wrap="square" lIns="0" tIns="0" rIns="0" bIns="0" rtlCol="0" anchor="ctr"/>
           <a:lstStyle/>
           <a:p>
-            <a:pPr indent="0" marL="0">
+            <a:pPr marL="0" indent="0">
               <a:buNone/>
             </a:pPr>
             <a:r>
@@ -4086,7 +3882,7 @@
           <a:bodyPr wrap="square" lIns="0" tIns="0" rIns="0" bIns="0" rtlCol="0" anchor="ctr"/>
           <a:lstStyle/>
           <a:p>
-            <a:pPr indent="0" marL="0">
+            <a:pPr marL="0" indent="0">
               <a:buNone/>
             </a:pPr>
             <a:r>
@@ -4125,7 +3921,7 @@
           <a:bodyPr wrap="square" lIns="0" tIns="0" rIns="0" bIns="0" rtlCol="0" anchor="ctr"/>
           <a:lstStyle/>
           <a:p>
-            <a:pPr indent="0" marL="0">
+            <a:pPr marL="0" indent="0">
               <a:buNone/>
             </a:pPr>
             <a:r>
@@ -4164,7 +3960,7 @@
           <a:bodyPr wrap="square" lIns="0" tIns="0" rIns="0" bIns="0" rtlCol="0" anchor="ctr"/>
           <a:lstStyle/>
           <a:p>
-            <a:pPr indent="0" marL="0">
+            <a:pPr marL="0" indent="0">
               <a:buNone/>
             </a:pPr>
             <a:r>
@@ -4203,7 +3999,7 @@
           <a:bodyPr wrap="square" lIns="0" tIns="0" rIns="0" bIns="0" rtlCol="0" anchor="ctr"/>
           <a:lstStyle/>
           <a:p>
-            <a:pPr indent="0" marL="0">
+            <a:pPr marL="0" indent="0">
               <a:buNone/>
             </a:pPr>
             <a:r>
@@ -4242,7 +4038,7 @@
           <a:bodyPr wrap="square" lIns="0" tIns="0" rIns="0" bIns="0" rtlCol="0" anchor="ctr"/>
           <a:lstStyle/>
           <a:p>
-            <a:pPr indent="0" marL="0">
+            <a:pPr marL="0" indent="0">
               <a:buNone/>
             </a:pPr>
             <a:r>
@@ -4281,7 +4077,7 @@
           <a:bodyPr wrap="square" lIns="0" tIns="0" rIns="0" bIns="0" rtlCol="0" anchor="ctr"/>
           <a:lstStyle/>
           <a:p>
-            <a:pPr indent="0" marL="0">
+            <a:pPr marL="0" indent="0">
               <a:buNone/>
             </a:pPr>
             <a:r>
@@ -4320,7 +4116,7 @@
           <a:bodyPr wrap="square" lIns="0" tIns="0" rIns="0" bIns="0" rtlCol="0" anchor="ctr"/>
           <a:lstStyle/>
           <a:p>
-            <a:pPr indent="0" marL="0">
+            <a:pPr marL="0" indent="0">
               <a:buNone/>
             </a:pPr>
             <a:r>
@@ -4382,7 +4178,7 @@
           <a:bodyPr wrap="square" lIns="0" tIns="0" rIns="0" bIns="0" rtlCol="0" anchor="ctr"/>
           <a:lstStyle/>
           <a:p>
-            <a:pPr indent="0" marL="0">
+            <a:pPr marL="0" indent="0">
               <a:lnSpc>
                 <a:spcPts val="2000"/>
               </a:lnSpc>
@@ -4424,7 +4220,7 @@
           <a:bodyPr wrap="square" lIns="0" tIns="0" rIns="0" bIns="0" rtlCol="0" anchor="ctr"/>
           <a:lstStyle/>
           <a:p>
-            <a:pPr indent="0" marL="0">
+            <a:pPr marL="0" indent="0">
               <a:lnSpc>
                 <a:spcPts val="2200"/>
               </a:lnSpc>
@@ -4466,7 +4262,7 @@
           <a:bodyPr wrap="square" lIns="0" tIns="0" rIns="0" bIns="0" rtlCol="0" anchor="ctr"/>
           <a:lstStyle/>
           <a:p>
-            <a:pPr indent="0" marL="0">
+            <a:pPr marL="0" indent="0">
               <a:buNone/>
             </a:pPr>
             <a:r>
@@ -4505,7 +4301,7 @@
           <a:bodyPr wrap="square" lIns="0" tIns="0" rIns="0" bIns="0" rtlCol="0" anchor="ctr"/>
           <a:lstStyle/>
           <a:p>
-            <a:pPr algn="r" indent="0" marL="0">
+            <a:pPr marL="0" indent="0" algn="r">
               <a:buNone/>
             </a:pPr>
             <a:r>
@@ -4569,11 +4365,11 @@
           <a:bodyPr wrap="square" lIns="0" tIns="0" rIns="0" bIns="0" rtlCol="0" anchor="ctr"/>
           <a:lstStyle/>
           <a:p>
-            <a:pPr indent="0" marL="0">
-              <a:buNone/>
-            </a:pPr>
-            <a:r>
-              <a:rPr lang="en-US" sz="1200" spc="200" kern="0" dirty="0">
+            <a:pPr marL="0" indent="0">
+              <a:buNone/>
+            </a:pPr>
+            <a:r>
+              <a:rPr lang="en-US" sz="1200" kern="0" spc="200" dirty="0">
                 <a:solidFill>
                   <a:srgbClr val="6B6255"/>
                 </a:solidFill>
@@ -4608,7 +4404,7 @@
           <a:bodyPr wrap="square" lIns="0" tIns="0" rIns="0" bIns="0" rtlCol="0" anchor="ctr"/>
           <a:lstStyle/>
           <a:p>
-            <a:pPr indent="0" marL="0">
+            <a:pPr marL="0" indent="0">
               <a:buNone/>
             </a:pPr>
             <a:r>
@@ -4647,7 +4443,7 @@
           <a:bodyPr wrap="square" lIns="0" tIns="0" rIns="0" bIns="0" rtlCol="0" anchor="ctr"/>
           <a:lstStyle/>
           <a:p>
-            <a:pPr indent="0" marL="0">
+            <a:pPr marL="0" indent="0">
               <a:buNone/>
             </a:pPr>
             <a:r>
@@ -4804,7 +4600,7 @@
           <a:bodyPr wrap="square" lIns="0" tIns="0" rIns="0" bIns="0" rtlCol="0" anchor="ctr"/>
           <a:lstStyle/>
           <a:p>
-            <a:pPr indent="0" marL="0">
+            <a:pPr marL="0" indent="0">
               <a:buNone/>
             </a:pPr>
             <a:r>
@@ -4937,7 +4733,7 @@
           <a:bodyPr wrap="square" lIns="0" tIns="0" rIns="0" bIns="0" rtlCol="0" anchor="ctr"/>
           <a:lstStyle/>
           <a:p>
-            <a:pPr indent="0" marL="0">
+            <a:pPr marL="0" indent="0">
               <a:buNone/>
             </a:pPr>
             <a:r>
@@ -5070,7 +4866,7 @@
           <a:bodyPr wrap="square" lIns="0" tIns="0" rIns="0" bIns="0" rtlCol="0" anchor="ctr"/>
           <a:lstStyle/>
           <a:p>
-            <a:pPr indent="0" marL="0">
+            <a:pPr marL="0" indent="0">
               <a:buNone/>
             </a:pPr>
             <a:r>
@@ -5109,7 +4905,7 @@
           <a:bodyPr wrap="square" lIns="0" tIns="0" rIns="0" bIns="0" rtlCol="0" anchor="ctr"/>
           <a:lstStyle/>
           <a:p>
-            <a:pPr algn="r" indent="0" marL="0">
+            <a:pPr marL="0" indent="0" algn="r">
               <a:buNone/>
             </a:pPr>
             <a:r>
@@ -5173,11 +4969,11 @@
           <a:bodyPr wrap="square" lIns="0" tIns="0" rIns="0" bIns="0" rtlCol="0" anchor="ctr"/>
           <a:lstStyle/>
           <a:p>
-            <a:pPr indent="0" marL="0">
-              <a:buNone/>
-            </a:pPr>
-            <a:r>
-              <a:rPr lang="en-US" sz="1200" spc="200" kern="0" dirty="0">
+            <a:pPr marL="0" indent="0">
+              <a:buNone/>
+            </a:pPr>
+            <a:r>
+              <a:rPr lang="en-US" sz="1200" kern="0" spc="200" dirty="0">
                 <a:solidFill>
                   <a:srgbClr val="6B6255"/>
                 </a:solidFill>
@@ -5212,7 +5008,7 @@
           <a:bodyPr wrap="square" lIns="0" tIns="0" rIns="0" bIns="0" rtlCol="0" anchor="ctr"/>
           <a:lstStyle/>
           <a:p>
-            <a:pPr indent="0" marL="0">
+            <a:pPr marL="0" indent="0">
               <a:buNone/>
             </a:pPr>
             <a:r>
@@ -5391,7 +5187,7 @@
           <a:bodyPr wrap="square" lIns="0" tIns="0" rIns="0" bIns="0" rtlCol="0" anchor="ctr"/>
           <a:lstStyle/>
           <a:p>
-            <a:pPr algn="ctr" indent="0" marL="0">
+            <a:pPr marL="0" indent="0" algn="ctr">
               <a:buNone/>
             </a:pPr>
             <a:r>
@@ -5434,7 +5230,7 @@
           <a:bodyPr wrap="square" lIns="0" tIns="0" rIns="0" bIns="0" rtlCol="0" anchor="ctr"/>
           <a:lstStyle/>
           <a:p>
-            <a:pPr algn="ctr" indent="0" marL="0">
+            <a:pPr marL="0" indent="0" algn="ctr">
               <a:buNone/>
             </a:pPr>
             <a:r>
@@ -5477,7 +5273,7 @@
           <a:bodyPr wrap="square" lIns="0" tIns="0" rIns="0" bIns="0" rtlCol="0" anchor="ctr"/>
           <a:lstStyle/>
           <a:p>
-            <a:pPr algn="ctr" indent="0" marL="0">
+            <a:pPr marL="0" indent="0" algn="ctr">
               <a:buNone/>
             </a:pPr>
             <a:r>
@@ -5520,7 +5316,7 @@
           <a:bodyPr wrap="square" lIns="0" tIns="0" rIns="0" bIns="0" rtlCol="0" anchor="ctr"/>
           <a:lstStyle/>
           <a:p>
-            <a:pPr algn="ctr" indent="0" marL="0">
+            <a:pPr marL="0" indent="0" algn="ctr">
               <a:buNone/>
             </a:pPr>
             <a:r>
@@ -5563,7 +5359,7 @@
           <a:bodyPr wrap="square" lIns="0" tIns="0" rIns="0" bIns="0" rtlCol="0" anchor="ctr"/>
           <a:lstStyle/>
           <a:p>
-            <a:pPr algn="ctr" indent="0" marL="0">
+            <a:pPr marL="0" indent="0" algn="ctr">
               <a:buNone/>
             </a:pPr>
             <a:r>
@@ -5606,7 +5402,7 @@
           <a:bodyPr wrap="square" lIns="0" tIns="0" rIns="0" bIns="0" rtlCol="0" anchor="ctr"/>
           <a:lstStyle/>
           <a:p>
-            <a:pPr algn="ctr" indent="0" marL="0">
+            <a:pPr marL="0" indent="0" algn="ctr">
               <a:buNone/>
             </a:pPr>
             <a:r>
@@ -5649,7 +5445,7 @@
           <a:bodyPr wrap="square" lIns="0" tIns="0" rIns="0" bIns="0" rtlCol="0" anchor="ctr"/>
           <a:lstStyle/>
           <a:p>
-            <a:pPr algn="ctr" indent="0" marL="0">
+            <a:pPr marL="0" indent="0" algn="ctr">
               <a:buNone/>
             </a:pPr>
             <a:r>
@@ -5688,7 +5484,7 @@
           <a:bodyPr wrap="square" lIns="0" tIns="0" rIns="0" bIns="0" rtlCol="0" anchor="ctr"/>
           <a:lstStyle/>
           <a:p>
-            <a:pPr indent="0" marL="0">
+            <a:pPr marL="0" indent="0">
               <a:buNone/>
             </a:pPr>
             <a:r>
@@ -5727,7 +5523,7 @@
           <a:bodyPr wrap="square" lIns="0" tIns="0" rIns="0" bIns="0" rtlCol="0" anchor="ctr"/>
           <a:lstStyle/>
           <a:p>
-            <a:pPr indent="0" marL="0">
+            <a:pPr marL="0" indent="0">
               <a:buNone/>
             </a:pPr>
             <a:r>
@@ -5766,7 +5562,7 @@
           <a:bodyPr wrap="square" lIns="0" tIns="0" rIns="0" bIns="0" rtlCol="0" anchor="ctr"/>
           <a:lstStyle/>
           <a:p>
-            <a:pPr algn="r" indent="0" marL="0">
+            <a:pPr marL="0" indent="0" algn="r">
               <a:buNone/>
             </a:pPr>
             <a:r>
@@ -5830,11 +5626,11 @@
           <a:bodyPr wrap="square" lIns="0" tIns="0" rIns="0" bIns="0" rtlCol="0" anchor="ctr"/>
           <a:lstStyle/>
           <a:p>
-            <a:pPr indent="0" marL="0">
-              <a:buNone/>
-            </a:pPr>
-            <a:r>
-              <a:rPr lang="en-US" sz="1200" spc="200" kern="0" dirty="0">
+            <a:pPr marL="0" indent="0">
+              <a:buNone/>
+            </a:pPr>
+            <a:r>
+              <a:rPr lang="en-US" sz="1200" kern="0" spc="200" dirty="0">
                 <a:solidFill>
                   <a:srgbClr val="6B6255"/>
                 </a:solidFill>
@@ -5869,7 +5665,7 @@
           <a:bodyPr wrap="square" lIns="0" tIns="0" rIns="0" bIns="0" rtlCol="0" anchor="ctr"/>
           <a:lstStyle/>
           <a:p>
-            <a:pPr indent="0" marL="0">
+            <a:pPr marL="0" indent="0">
               <a:buNone/>
             </a:pPr>
             <a:r>
@@ -5908,7 +5704,7 @@
           <a:bodyPr wrap="square" lIns="0" tIns="0" rIns="0" bIns="0" rtlCol="0" anchor="t"/>
           <a:lstStyle/>
           <a:p>
-            <a:pPr indent="0" marL="0">
+            <a:pPr marL="0" indent="0">
               <a:buNone/>
             </a:pPr>
             <a:r>
@@ -5947,7 +5743,7 @@
           <a:bodyPr wrap="square" lIns="0" tIns="0" rIns="0" bIns="0" rtlCol="0" anchor="t"/>
           <a:lstStyle/>
           <a:p>
-            <a:pPr indent="0" marL="0">
+            <a:pPr marL="0" indent="0">
               <a:buNone/>
             </a:pPr>
             <a:r>
@@ -6009,7 +5805,7 @@
           <a:bodyPr wrap="square" lIns="0" tIns="0" rIns="0" bIns="0" rtlCol="0" anchor="t"/>
           <a:lstStyle/>
           <a:p>
-            <a:pPr indent="0" marL="0">
+            <a:pPr marL="0" indent="0">
               <a:buNone/>
             </a:pPr>
             <a:r>
@@ -6048,7 +5844,7 @@
           <a:bodyPr wrap="square" lIns="0" tIns="0" rIns="0" bIns="0" rtlCol="0" anchor="t"/>
           <a:lstStyle/>
           <a:p>
-            <a:pPr indent="0" marL="0">
+            <a:pPr marL="0" indent="0">
               <a:buNone/>
             </a:pPr>
             <a:r>
@@ -6110,7 +5906,7 @@
           <a:bodyPr wrap="square" lIns="0" tIns="0" rIns="0" bIns="0" rtlCol="0" anchor="t"/>
           <a:lstStyle/>
           <a:p>
-            <a:pPr indent="0" marL="0">
+            <a:pPr marL="0" indent="0">
               <a:buNone/>
             </a:pPr>
             <a:r>
@@ -6149,7 +5945,7 @@
           <a:bodyPr wrap="square" lIns="0" tIns="0" rIns="0" bIns="0" rtlCol="0" anchor="t"/>
           <a:lstStyle/>
           <a:p>
-            <a:pPr indent="0" marL="0">
+            <a:pPr marL="0" indent="0">
               <a:buNone/>
             </a:pPr>
             <a:r>
@@ -6211,7 +6007,7 @@
           <a:bodyPr wrap="square" lIns="0" tIns="0" rIns="0" bIns="0" rtlCol="0" anchor="t"/>
           <a:lstStyle/>
           <a:p>
-            <a:pPr indent="0" marL="0">
+            <a:pPr marL="0" indent="0">
               <a:buNone/>
             </a:pPr>
             <a:r>
@@ -6250,7 +6046,7 @@
           <a:bodyPr wrap="square" lIns="0" tIns="0" rIns="0" bIns="0" rtlCol="0" anchor="t"/>
           <a:lstStyle/>
           <a:p>
-            <a:pPr indent="0" marL="0">
+            <a:pPr marL="0" indent="0">
               <a:buNone/>
             </a:pPr>
             <a:r>
@@ -6312,7 +6108,7 @@
           <a:bodyPr wrap="square" lIns="0" tIns="0" rIns="0" bIns="0" rtlCol="0" anchor="t"/>
           <a:lstStyle/>
           <a:p>
-            <a:pPr indent="0" marL="0">
+            <a:pPr marL="0" indent="0">
               <a:buNone/>
             </a:pPr>
             <a:r>
@@ -6351,7 +6147,7 @@
           <a:bodyPr wrap="square" lIns="0" tIns="0" rIns="0" bIns="0" rtlCol="0" anchor="t"/>
           <a:lstStyle/>
           <a:p>
-            <a:pPr indent="0" marL="0">
+            <a:pPr marL="0" indent="0">
               <a:buNone/>
             </a:pPr>
             <a:r>
@@ -6413,7 +6209,7 @@
           <a:bodyPr wrap="square" lIns="0" tIns="0" rIns="0" bIns="0" rtlCol="0" anchor="ctr"/>
           <a:lstStyle/>
           <a:p>
-            <a:pPr indent="0" marL="0">
+            <a:pPr marL="0" indent="0">
               <a:buNone/>
             </a:pPr>
             <a:r>
@@ -6452,7 +6248,7 @@
           <a:bodyPr wrap="square" lIns="0" tIns="0" rIns="0" bIns="0" rtlCol="0" anchor="ctr"/>
           <a:lstStyle/>
           <a:p>
-            <a:pPr algn="r" indent="0" marL="0">
+            <a:pPr marL="0" indent="0" algn="r">
               <a:buNone/>
             </a:pPr>
             <a:r>
@@ -6516,11 +6312,11 @@
           <a:bodyPr wrap="square" lIns="0" tIns="0" rIns="0" bIns="0" rtlCol="0" anchor="ctr"/>
           <a:lstStyle/>
           <a:p>
-            <a:pPr indent="0" marL="0">
-              <a:buNone/>
-            </a:pPr>
-            <a:r>
-              <a:rPr lang="en-US" sz="1200" spc="200" kern="0" dirty="0">
+            <a:pPr marL="0" indent="0">
+              <a:buNone/>
+            </a:pPr>
+            <a:r>
+              <a:rPr lang="en-US" sz="1200" kern="0" spc="200" dirty="0">
                 <a:solidFill>
                   <a:srgbClr val="6B6255"/>
                 </a:solidFill>
@@ -6555,7 +6351,7 @@
           <a:bodyPr wrap="square" lIns="0" tIns="0" rIns="0" bIns="0" rtlCol="0" anchor="ctr"/>
           <a:lstStyle/>
           <a:p>
-            <a:pPr indent="0" marL="0">
+            <a:pPr marL="0" indent="0">
               <a:buNone/>
             </a:pPr>
             <a:r>
@@ -6575,15 +6371,15 @@
       </p:sp>
       <p:pic>
         <p:nvPicPr>
-          <p:cNvPr id="4" name="Image 0" descr="/home/claude/work/dashboard_screens/01_Executive_Summary.png">    </p:cNvPr>
+          <p:cNvPr id="4" name="Image 0" descr="/home/claude/work/dashboard_screens/01_Executive_Summary.png"/>
           <p:cNvPicPr>
             <a:picLocks noChangeAspect="1"/>
           </p:cNvPicPr>
           <p:nvPr/>
         </p:nvPicPr>
         <p:blipFill>
-          <a:blip r:embed="rId1"/>
-          <a:srcRect l="0" r="0" t="0" b="0"/>
+          <a:blip r:embed="rId3"/>
+          <a:srcRect/>
           <a:stretch/>
         </p:blipFill>
         <p:spPr>
@@ -6617,7 +6413,7 @@
           <a:bodyPr wrap="square" lIns="0" tIns="0" rIns="0" bIns="0" rtlCol="0" anchor="ctr"/>
           <a:lstStyle/>
           <a:p>
-            <a:pPr indent="0" marL="0">
+            <a:pPr marL="0" indent="0">
               <a:buNone/>
             </a:pPr>
             <a:r>
@@ -6656,7 +6452,7 @@
           <a:bodyPr wrap="square" lIns="0" tIns="0" rIns="0" bIns="0" rtlCol="0" anchor="ctr"/>
           <a:lstStyle/>
           <a:p>
-            <a:pPr algn="r" indent="0" marL="0">
+            <a:pPr marL="0" indent="0" algn="r">
               <a:buNone/>
             </a:pPr>
             <a:r>
@@ -6720,11 +6516,11 @@
           <a:bodyPr wrap="square" lIns="0" tIns="0" rIns="0" bIns="0" rtlCol="0" anchor="ctr"/>
           <a:lstStyle/>
           <a:p>
-            <a:pPr indent="0" marL="0">
-              <a:buNone/>
-            </a:pPr>
-            <a:r>
-              <a:rPr lang="en-US" sz="1200" spc="200" kern="0" dirty="0">
+            <a:pPr marL="0" indent="0">
+              <a:buNone/>
+            </a:pPr>
+            <a:r>
+              <a:rPr lang="en-US" sz="1200" kern="0" spc="200" dirty="0">
                 <a:solidFill>
                   <a:srgbClr val="6B6255"/>
                 </a:solidFill>
@@ -6759,7 +6555,7 @@
           <a:bodyPr wrap="square" lIns="0" tIns="0" rIns="0" bIns="0" rtlCol="0" anchor="ctr"/>
           <a:lstStyle/>
           <a:p>
-            <a:pPr indent="0" marL="0">
+            <a:pPr marL="0" indent="0">
               <a:buNone/>
             </a:pPr>
             <a:r>
@@ -6779,15 +6575,15 @@
       </p:sp>
       <p:pic>
         <p:nvPicPr>
-          <p:cNvPr id="4" name="Image 0" descr="/home/claude/work/dashboard_screens/02_Trend_Analysis.png">    </p:cNvPr>
+          <p:cNvPr id="4" name="Image 0" descr="/home/claude/work/dashboard_screens/02_Trend_Analysis.png"/>
           <p:cNvPicPr>
             <a:picLocks noChangeAspect="1"/>
           </p:cNvPicPr>
           <p:nvPr/>
         </p:nvPicPr>
         <p:blipFill>
-          <a:blip r:embed="rId1"/>
-          <a:srcRect l="0" r="0" t="0" b="0"/>
+          <a:blip r:embed="rId3"/>
+          <a:srcRect/>
           <a:stretch/>
         </p:blipFill>
         <p:spPr>
@@ -6821,7 +6617,7 @@
           <a:bodyPr wrap="square" lIns="0" tIns="0" rIns="0" bIns="0" rtlCol="0" anchor="ctr"/>
           <a:lstStyle/>
           <a:p>
-            <a:pPr indent="0" marL="0">
+            <a:pPr marL="0" indent="0">
               <a:buNone/>
             </a:pPr>
             <a:r>
@@ -6860,7 +6656,7 @@
           <a:bodyPr wrap="square" lIns="0" tIns="0" rIns="0" bIns="0" rtlCol="0" anchor="ctr"/>
           <a:lstStyle/>
           <a:p>
-            <a:pPr algn="r" indent="0" marL="0">
+            <a:pPr marL="0" indent="0" algn="r">
               <a:buNone/>
             </a:pPr>
             <a:r>
@@ -6924,11 +6720,11 @@
           <a:bodyPr wrap="square" lIns="0" tIns="0" rIns="0" bIns="0" rtlCol="0" anchor="ctr"/>
           <a:lstStyle/>
           <a:p>
-            <a:pPr indent="0" marL="0">
-              <a:buNone/>
-            </a:pPr>
-            <a:r>
-              <a:rPr lang="en-US" sz="1200" spc="200" kern="0" dirty="0">
+            <a:pPr marL="0" indent="0">
+              <a:buNone/>
+            </a:pPr>
+            <a:r>
+              <a:rPr lang="en-US" sz="1200" kern="0" spc="200" dirty="0">
                 <a:solidFill>
                   <a:srgbClr val="6B6255"/>
                 </a:solidFill>
@@ -6963,7 +6759,7 @@
           <a:bodyPr wrap="square" lIns="0" tIns="0" rIns="0" bIns="0" rtlCol="0" anchor="ctr"/>
           <a:lstStyle/>
           <a:p>
-            <a:pPr indent="0" marL="0">
+            <a:pPr marL="0" indent="0">
               <a:buNone/>
             </a:pPr>
             <a:r>
@@ -6983,15 +6779,15 @@
       </p:sp>
       <p:pic>
         <p:nvPicPr>
-          <p:cNvPr id="4" name="Image 0" descr="/home/claude/work/dashboard_screens/03_Geographic_Segment_Analysis.png">    </p:cNvPr>
+          <p:cNvPr id="4" name="Image 0" descr="/home/claude/work/dashboard_screens/03_Geographic_Segment_Analysis.png"/>
           <p:cNvPicPr>
             <a:picLocks noChangeAspect="1"/>
           </p:cNvPicPr>
           <p:nvPr/>
         </p:nvPicPr>
         <p:blipFill>
-          <a:blip r:embed="rId1"/>
-          <a:srcRect l="0" r="0" t="0" b="0"/>
+          <a:blip r:embed="rId3"/>
+          <a:srcRect/>
           <a:stretch/>
         </p:blipFill>
         <p:spPr>
@@ -7025,7 +6821,7 @@
           <a:bodyPr wrap="square" lIns="0" tIns="0" rIns="0" bIns="0" rtlCol="0" anchor="ctr"/>
           <a:lstStyle/>
           <a:p>
-            <a:pPr indent="0" marL="0">
+            <a:pPr marL="0" indent="0">
               <a:buNone/>
             </a:pPr>
             <a:r>
@@ -7064,7 +6860,7 @@
           <a:bodyPr wrap="square" lIns="0" tIns="0" rIns="0" bIns="0" rtlCol="0" anchor="ctr"/>
           <a:lstStyle/>
           <a:p>
-            <a:pPr algn="r" indent="0" marL="0">
+            <a:pPr marL="0" indent="0" algn="r">
               <a:buNone/>
             </a:pPr>
             <a:r>
@@ -7383,4 +7179,299 @@
     </a:ext>
   </a:extLst>
 </a:theme>
+</file>
+
+<file path=ppt/theme/theme2.xml><?xml version="1.0" encoding="utf-8"?>
+<a:theme xmlns:a="http://schemas.openxmlformats.org/drawingml/2006/main" name="Office Theme">
+  <a:themeElements>
+    <a:clrScheme name="Office">
+      <a:dk1>
+        <a:sysClr val="windowText" lastClr="000000"/>
+      </a:dk1>
+      <a:lt1>
+        <a:sysClr val="window" lastClr="FFFFFF"/>
+      </a:lt1>
+      <a:dk2>
+        <a:srgbClr val="44546A"/>
+      </a:dk2>
+      <a:lt2>
+        <a:srgbClr val="E7E6E6"/>
+      </a:lt2>
+      <a:accent1>
+        <a:srgbClr val="4472C4"/>
+      </a:accent1>
+      <a:accent2>
+        <a:srgbClr val="ED7D31"/>
+      </a:accent2>
+      <a:accent3>
+        <a:srgbClr val="A5A5A5"/>
+      </a:accent3>
+      <a:accent4>
+        <a:srgbClr val="FFC000"/>
+      </a:accent4>
+      <a:accent5>
+        <a:srgbClr val="5B9BD5"/>
+      </a:accent5>
+      <a:accent6>
+        <a:srgbClr val="70AD47"/>
+      </a:accent6>
+      <a:hlink>
+        <a:srgbClr val="0563C1"/>
+      </a:hlink>
+      <a:folHlink>
+        <a:srgbClr val="954F72"/>
+      </a:folHlink>
+    </a:clrScheme>
+    <a:fontScheme name="Office">
+      <a:majorFont>
+        <a:latin typeface="Calibri Light" panose="020F0302020204030204"/>
+        <a:ea typeface=""/>
+        <a:cs typeface=""/>
+        <a:font script="Jpan" typeface="游ゴシック Light"/>
+        <a:font script="Hang" typeface="맑은 고딕"/>
+        <a:font script="Hans" typeface="等线 Light"/>
+        <a:font script="Hant" typeface="新細明體"/>
+        <a:font script="Arab" typeface="Times New Roman"/>
+        <a:font script="Hebr" typeface="Times New Roman"/>
+        <a:font script="Thai" typeface="Angsana New"/>
+        <a:font script="Ethi" typeface="Nyala"/>
+        <a:font script="Beng" typeface="Vrinda"/>
+        <a:font script="Gujr" typeface="Shruti"/>
+        <a:font script="Khmr" typeface="MoolBoran"/>
+        <a:font script="Knda" typeface="Tunga"/>
+        <a:font script="Guru" typeface="Raavi"/>
+        <a:font script="Cans" typeface="Euphemia"/>
+        <a:font script="Cher" typeface="Plantagenet Cherokee"/>
+        <a:font script="Yiii" typeface="Microsoft Yi Baiti"/>
+        <a:font script="Tibt" typeface="Microsoft Himalaya"/>
+        <a:font script="Thaa" typeface="MV Boli"/>
+        <a:font script="Deva" typeface="Mangal"/>
+        <a:font script="Telu" typeface="Gautami"/>
+        <a:font script="Taml" typeface="Latha"/>
+        <a:font script="Syrc" typeface="Estrangelo Edessa"/>
+        <a:font script="Orya" typeface="Kalinga"/>
+        <a:font script="Mlym" typeface="Kartika"/>
+        <a:font script="Laoo" typeface="DokChampa"/>
+        <a:font script="Sinh" typeface="Iskoola Pota"/>
+        <a:font script="Mong" typeface="Mongolian Baiti"/>
+        <a:font script="Viet" typeface="Times New Roman"/>
+        <a:font script="Uigh" typeface="Microsoft Uighur"/>
+        <a:font script="Geor" typeface="Sylfaen"/>
+        <a:font script="Armn" typeface="Arial"/>
+        <a:font script="Bugi" typeface="Leelawadee UI"/>
+        <a:font script="Bopo" typeface="Microsoft JhengHei"/>
+        <a:font script="Java" typeface="Javanese Text"/>
+        <a:font script="Lisu" typeface="Segoe UI"/>
+        <a:font script="Mymr" typeface="Myanmar Text"/>
+        <a:font script="Nkoo" typeface="Ebrima"/>
+        <a:font script="Olck" typeface="Nirmala UI"/>
+        <a:font script="Osma" typeface="Ebrima"/>
+        <a:font script="Phag" typeface="Phagspa"/>
+        <a:font script="Syrn" typeface="Estrangelo Edessa"/>
+        <a:font script="Syrj" typeface="Estrangelo Edessa"/>
+        <a:font script="Syre" typeface="Estrangelo Edessa"/>
+        <a:font script="Sora" typeface="Nirmala UI"/>
+        <a:font script="Tale" typeface="Microsoft Tai Le"/>
+        <a:font script="Talu" typeface="Microsoft New Tai Lue"/>
+        <a:font script="Tfng" typeface="Ebrima"/>
+      </a:majorFont>
+      <a:minorFont>
+        <a:latin typeface="Calibri" panose="020F0502020204030204"/>
+        <a:ea typeface=""/>
+        <a:cs typeface=""/>
+        <a:font script="Jpan" typeface="游ゴシック"/>
+        <a:font script="Hang" typeface="맑은 고딕"/>
+        <a:font script="Hans" typeface="等线"/>
+        <a:font script="Hant" typeface="新細明體"/>
+        <a:font script="Arab" typeface="Arial"/>
+        <a:font script="Hebr" typeface="Arial"/>
+        <a:font script="Thai" typeface="Cordia New"/>
+        <a:font script="Ethi" typeface="Nyala"/>
+        <a:font script="Beng" typeface="Vrinda"/>
+        <a:font script="Gujr" typeface="Shruti"/>
+        <a:font script="Khmr" typeface="DaunPenh"/>
+        <a:font script="Knda" typeface="Tunga"/>
+        <a:font script="Guru" typeface="Raavi"/>
+        <a:font script="Cans" typeface="Euphemia"/>
+        <a:font script="Cher" typeface="Plantagenet Cherokee"/>
+        <a:font script="Yiii" typeface="Microsoft Yi Baiti"/>
+        <a:font script="Tibt" typeface="Microsoft Himalaya"/>
+        <a:font script="Thaa" typeface="MV Boli"/>
+        <a:font script="Deva" typeface="Mangal"/>
+        <a:font script="Telu" typeface="Gautami"/>
+        <a:font script="Taml" typeface="Latha"/>
+        <a:font script="Syrc" typeface="Estrangelo Edessa"/>
+        <a:font script="Orya" typeface="Kalinga"/>
+        <a:font script="Mlym" typeface="Kartika"/>
+        <a:font script="Laoo" typeface="DokChampa"/>
+        <a:font script="Sinh" typeface="Iskoola Pota"/>
+        <a:font script="Mong" typeface="Mongolian Baiti"/>
+        <a:font script="Viet" typeface="Arial"/>
+        <a:font script="Uigh" typeface="Microsoft Uighur"/>
+        <a:font script="Geor" typeface="Sylfaen"/>
+        <a:font script="Armn" typeface="Arial"/>
+        <a:font script="Bugi" typeface="Leelawadee UI"/>
+        <a:font script="Bopo" typeface="Microsoft JhengHei"/>
+        <a:font script="Java" typeface="Javanese Text"/>
+        <a:font script="Lisu" typeface="Segoe UI"/>
+        <a:font script="Mymr" typeface="Myanmar Text"/>
+        <a:font script="Nkoo" typeface="Ebrima"/>
+        <a:font script="Olck" typeface="Nirmala UI"/>
+        <a:font script="Osma" typeface="Ebrima"/>
+        <a:font script="Phag" typeface="Phagspa"/>
+        <a:font script="Syrn" typeface="Estrangelo Edessa"/>
+        <a:font script="Syrj" typeface="Estrangelo Edessa"/>
+        <a:font script="Syre" typeface="Estrangelo Edessa"/>
+        <a:font script="Sora" typeface="Nirmala UI"/>
+        <a:font script="Tale" typeface="Microsoft Tai Le"/>
+        <a:font script="Talu" typeface="Microsoft New Tai Lue"/>
+        <a:font script="Tfng" typeface="Ebrima"/>
+      </a:minorFont>
+    </a:fontScheme>
+    <a:fmtScheme name="Office">
+      <a:fillStyleLst>
+        <a:solidFill>
+          <a:schemeClr val="phClr"/>
+        </a:solidFill>
+        <a:gradFill rotWithShape="1">
+          <a:gsLst>
+            <a:gs pos="0">
+              <a:schemeClr val="phClr">
+                <a:lumMod val="110000"/>
+                <a:satMod val="105000"/>
+                <a:tint val="67000"/>
+              </a:schemeClr>
+            </a:gs>
+            <a:gs pos="50000">
+              <a:schemeClr val="phClr">
+                <a:lumMod val="105000"/>
+                <a:satMod val="103000"/>
+                <a:tint val="73000"/>
+              </a:schemeClr>
+            </a:gs>
+            <a:gs pos="100000">
+              <a:schemeClr val="phClr">
+                <a:lumMod val="105000"/>
+                <a:satMod val="109000"/>
+                <a:tint val="81000"/>
+              </a:schemeClr>
+            </a:gs>
+          </a:gsLst>
+          <a:lin ang="5400000" scaled="0"/>
+        </a:gradFill>
+        <a:gradFill rotWithShape="1">
+          <a:gsLst>
+            <a:gs pos="0">
+              <a:schemeClr val="phClr">
+                <a:satMod val="103000"/>
+                <a:lumMod val="102000"/>
+                <a:tint val="94000"/>
+              </a:schemeClr>
+            </a:gs>
+            <a:gs pos="50000">
+              <a:schemeClr val="phClr">
+                <a:satMod val="110000"/>
+                <a:lumMod val="100000"/>
+                <a:shade val="100000"/>
+              </a:schemeClr>
+            </a:gs>
+            <a:gs pos="100000">
+              <a:schemeClr val="phClr">
+                <a:lumMod val="99000"/>
+                <a:satMod val="120000"/>
+                <a:shade val="78000"/>
+              </a:schemeClr>
+            </a:gs>
+          </a:gsLst>
+          <a:lin ang="5400000" scaled="0"/>
+        </a:gradFill>
+      </a:fillStyleLst>
+      <a:lnStyleLst>
+        <a:ln w="6350" cap="flat" cmpd="sng" algn="ctr">
+          <a:solidFill>
+            <a:schemeClr val="phClr"/>
+          </a:solidFill>
+          <a:prstDash val="solid"/>
+          <a:miter lim="800000"/>
+        </a:ln>
+        <a:ln w="12700" cap="flat" cmpd="sng" algn="ctr">
+          <a:solidFill>
+            <a:schemeClr val="phClr"/>
+          </a:solidFill>
+          <a:prstDash val="solid"/>
+          <a:miter lim="800000"/>
+        </a:ln>
+        <a:ln w="19050" cap="flat" cmpd="sng" algn="ctr">
+          <a:solidFill>
+            <a:schemeClr val="phClr"/>
+          </a:solidFill>
+          <a:prstDash val="solid"/>
+          <a:miter lim="800000"/>
+        </a:ln>
+      </a:lnStyleLst>
+      <a:effectStyleLst>
+        <a:effectStyle>
+          <a:effectLst/>
+        </a:effectStyle>
+        <a:effectStyle>
+          <a:effectLst/>
+        </a:effectStyle>
+        <a:effectStyle>
+          <a:effectLst>
+            <a:outerShdw blurRad="57150" dist="19050" dir="5400000" algn="ctr" rotWithShape="0">
+              <a:srgbClr val="000000">
+                <a:alpha val="63000"/>
+              </a:srgbClr>
+            </a:outerShdw>
+          </a:effectLst>
+        </a:effectStyle>
+      </a:effectStyleLst>
+      <a:bgFillStyleLst>
+        <a:solidFill>
+          <a:schemeClr val="phClr"/>
+        </a:solidFill>
+        <a:solidFill>
+          <a:schemeClr val="phClr">
+            <a:tint val="95000"/>
+            <a:satMod val="170000"/>
+          </a:schemeClr>
+        </a:solidFill>
+        <a:gradFill rotWithShape="1">
+          <a:gsLst>
+            <a:gs pos="0">
+              <a:schemeClr val="phClr">
+                <a:tint val="93000"/>
+                <a:satMod val="150000"/>
+                <a:shade val="98000"/>
+                <a:lumMod val="102000"/>
+              </a:schemeClr>
+            </a:gs>
+            <a:gs pos="50000">
+              <a:schemeClr val="phClr">
+                <a:tint val="98000"/>
+                <a:satMod val="130000"/>
+                <a:shade val="90000"/>
+                <a:lumMod val="103000"/>
+              </a:schemeClr>
+            </a:gs>
+            <a:gs pos="100000">
+              <a:schemeClr val="phClr">
+                <a:shade val="63000"/>
+                <a:satMod val="120000"/>
+              </a:schemeClr>
+            </a:gs>
+          </a:gsLst>
+          <a:lin ang="5400000" scaled="0"/>
+        </a:gradFill>
+      </a:bgFillStyleLst>
+    </a:fmtScheme>
+  </a:themeElements>
+  <a:objectDefaults/>
+  <a:extraClrSchemeLst/>
+  <a:extLst>
+    <a:ext uri="{05A4C25C-085E-4340-85A3-A5531E510DB2}">
+      <thm15:themeFamily xmlns:thm15="http://schemas.microsoft.com/office/thememl/2012/main" name="Office Theme" id="{62F939B6-93AF-4DB8-9C6B-D6C7DFDC589F}" vid="{4A3C46E8-61CC-4603-A589-7422A47A8E4A}"/>
+    </a:ext>
+  </a:extLst>
+</a:theme>
 </file>
--- a/Presentation.pptx
+++ b/Presentation.pptx
@@ -1923,7 +1923,23 @@
                 <a:ea typeface="Calibri" pitchFamily="34" charset="-122"/>
                 <a:cs typeface="Calibri" pitchFamily="34" charset="-120"/>
               </a:rPr>
-              <a:t>Group Project — </a:t>
+              <a:t>Group Project — Group 6</a:t>
+            </a:r>
+          </a:p>
+          <a:p>
+            <a:pPr marL="0" indent="0">
+              <a:buNone/>
+            </a:pPr>
+            <a:r>
+              <a:rPr lang="en-US" sz="1500" dirty="0">
+                <a:solidFill>
+                  <a:srgbClr val="6B6255"/>
+                </a:solidFill>
+                <a:latin typeface="Calibri" pitchFamily="34" charset="0"/>
+                <a:ea typeface="Calibri" pitchFamily="34" charset="-122"/>
+                <a:cs typeface="Calibri" pitchFamily="34" charset="-120"/>
+              </a:rPr>
+              <a:t>Wilson </a:t>
             </a:r>
             <a:r>
               <a:rPr lang="en-US" sz="1500">
@@ -1934,7 +1950,7 @@
                 <a:ea typeface="Calibri" pitchFamily="34" charset="-122"/>
                 <a:cs typeface="Calibri" pitchFamily="34" charset="-120"/>
               </a:rPr>
-              <a:t>Group 6</a:t>
+              <a:t>Jnr Muhia - 669024</a:t>
             </a:r>
             <a:endParaRPr lang="en-US" sz="1500" dirty="0">
               <a:solidFill>

--- a/Presentation.pptx
+++ b/Presentation.pptx
@@ -1939,27 +1939,8 @@
                 <a:ea typeface="Calibri" pitchFamily="34" charset="-122"/>
                 <a:cs typeface="Calibri" pitchFamily="34" charset="-120"/>
               </a:rPr>
-              <a:t>Wilson </a:t>
-            </a:r>
-            <a:r>
-              <a:rPr lang="en-US" sz="1500">
-                <a:solidFill>
-                  <a:srgbClr val="6B6255"/>
-                </a:solidFill>
-                <a:latin typeface="Calibri" pitchFamily="34" charset="0"/>
-                <a:ea typeface="Calibri" pitchFamily="34" charset="-122"/>
-                <a:cs typeface="Calibri" pitchFamily="34" charset="-120"/>
-              </a:rPr>
-              <a:t>Jnr Muhia - 669024</a:t>
-            </a:r>
-            <a:endParaRPr lang="en-US" sz="1500" dirty="0">
-              <a:solidFill>
-                <a:srgbClr val="6B6255"/>
-              </a:solidFill>
-              <a:latin typeface="Calibri" pitchFamily="34" charset="0"/>
-              <a:ea typeface="Calibri" pitchFamily="34" charset="-122"/>
-              <a:cs typeface="Calibri" pitchFamily="34" charset="-120"/>
-            </a:endParaRPr>
+              <a:t>Wilson Jnr Muhia - 669024</a:t>
+            </a:r>
           </a:p>
           <a:p>
             <a:pPr marL="0" indent="0">
@@ -2797,7 +2778,29 @@
                 <a:ea typeface="Calibri" pitchFamily="34" charset="-122"/>
                 <a:cs typeface="Calibri" pitchFamily="34" charset="-120"/>
               </a:rPr>
-              <a:t>A meaningful share of listings sit active for more than 30 days, flagging possible overpricing or mismatched demand in specific segments.</a:t>
+              <a:t>A meaningful share of listings </a:t>
+            </a:r>
+            <a:r>
+              <a:rPr lang="en-US" sz="1300">
+                <a:solidFill>
+                  <a:srgbClr val="6B6255"/>
+                </a:solidFill>
+                <a:latin typeface="Calibri" pitchFamily="34" charset="0"/>
+                <a:ea typeface="Calibri" pitchFamily="34" charset="-122"/>
+                <a:cs typeface="Calibri" pitchFamily="34" charset="-120"/>
+              </a:rPr>
+              <a:t>sit inactive </a:t>
+            </a:r>
+            <a:r>
+              <a:rPr lang="en-US" sz="1300" dirty="0">
+                <a:solidFill>
+                  <a:srgbClr val="6B6255"/>
+                </a:solidFill>
+                <a:latin typeface="Calibri" pitchFamily="34" charset="0"/>
+                <a:ea typeface="Calibri" pitchFamily="34" charset="-122"/>
+                <a:cs typeface="Calibri" pitchFamily="34" charset="-120"/>
+              </a:rPr>
+              <a:t>for more than 30 days, flagging possible overpricing or mismatched demand in specific segments.</a:t>
             </a:r>
             <a:endParaRPr lang="en-US" sz="1300" dirty="0"/>
           </a:p>
